--- a/instructor/slides/pptx/sections/14-dataweave-mapping.pptx
+++ b/instructor/slides/pptx/sections/14-dataweave-mapping.pptx
@@ -3670,8 +3670,8 @@
         </p:nvSpPr>
         <p:spPr>
           <a:xfrm>
-            <a:off x="640080" y="1920240"/>
-            <a:ext cx="10972800" cy="1463040"/>
+            <a:off x="640080" y="1828800"/>
+            <a:ext cx="6675120" cy="1645920"/>
           </a:xfrm>
           <a:prstGeom prst="rect">
             <a:avLst/>
@@ -3685,7 +3685,7 @@
           <a:lstStyle/>
           <a:p>
             <a:r>
-              <a:rPr sz="4400" b="1">
+              <a:rPr sz="4000" b="1">
                 <a:solidFill>
                   <a:srgbClr val="FFFFFF"/>
                 </a:solidFill>
@@ -3704,8 +3704,8 @@
         </p:nvSpPr>
         <p:spPr>
           <a:xfrm>
-            <a:off x="640080" y="3657600"/>
-            <a:ext cx="10789920" cy="1097280"/>
+            <a:off x="640080" y="3794760"/>
+            <a:ext cx="6675120" cy="1097280"/>
           </a:xfrm>
           <a:prstGeom prst="rect">
             <a:avLst/>
@@ -3719,7 +3719,7 @@
           <a:lstStyle/>
           <a:p>
             <a:r>
-              <a:rPr sz="2000" b="0">
+              <a:rPr sz="1800" b="0">
                 <a:solidFill>
                   <a:srgbClr val="B7CBDE"/>
                 </a:solidFill>
@@ -3730,6 +3730,30 @@
           </a:p>
         </p:txBody>
       </p:sp>
+      <p:pic>
+        <p:nvPicPr>
+          <p:cNvPr id="6" name="Picture 5" descr="dw-mapping.jpg"/>
+          <p:cNvPicPr>
+            <a:picLocks noChangeAspect="1"/>
+          </p:cNvPicPr>
+          <p:nvPr/>
+        </p:nvPicPr>
+        <p:blipFill>
+          <a:blip r:embed="rId2"/>
+          <a:stretch>
+            <a:fillRect/>
+          </a:stretch>
+        </p:blipFill>
+        <p:spPr>
+          <a:xfrm>
+            <a:off x="7452360" y="1325880"/>
+            <a:ext cx="4160520" cy="4160520"/>
+          </a:xfrm>
+          <a:prstGeom prst="rect">
+            <a:avLst/>
+          </a:prstGeom>
+        </p:spPr>
+      </p:pic>
     </p:spTree>
   </p:cSld>
   <p:clrMapOvr>
@@ -3833,8 +3857,8 @@
         </p:nvSpPr>
         <p:spPr>
           <a:xfrm>
-            <a:off x="640080" y="685800"/>
-            <a:ext cx="10972800" cy="1463040"/>
+            <a:off x="640080" y="658368"/>
+            <a:ext cx="7863840" cy="1645920"/>
           </a:xfrm>
           <a:prstGeom prst="rect">
             <a:avLst/>
@@ -3848,7 +3872,7 @@
           <a:lstStyle/>
           <a:p>
             <a:r>
-              <a:rPr sz="3200" b="1">
+              <a:rPr sz="3000" b="1">
                 <a:solidFill>
                   <a:srgbClr val="FFFFFF"/>
                 </a:solidFill>
@@ -3867,8 +3891,8 @@
         </p:nvSpPr>
         <p:spPr>
           <a:xfrm>
-            <a:off x="777240" y="2286000"/>
-            <a:ext cx="10607040" cy="4754880"/>
+            <a:off x="777240" y="2331720"/>
+            <a:ext cx="7498079" cy="4754880"/>
           </a:xfrm>
           <a:prstGeom prst="rect">
             <a:avLst/>
@@ -3887,7 +3911,7 @@
               </a:spcAft>
             </a:pPr>
             <a:r>
-              <a:rPr sz="2400" b="0">
+              <a:rPr sz="2200" b="0">
                 <a:solidFill>
                   <a:srgbClr val="FFFFFF"/>
                 </a:solidFill>
@@ -3903,7 +3927,7 @@
               </a:spcAft>
             </a:pPr>
             <a:r>
-              <a:rPr sz="2400" b="0">
+              <a:rPr sz="2200" b="0">
                 <a:solidFill>
                   <a:srgbClr val="FFFFFF"/>
                 </a:solidFill>
@@ -3919,7 +3943,7 @@
               </a:spcAft>
             </a:pPr>
             <a:r>
-              <a:rPr sz="2400" b="0">
+              <a:rPr sz="2200" b="0">
                 <a:solidFill>
                   <a:srgbClr val="FFFFFF"/>
                 </a:solidFill>
@@ -3930,6 +3954,30 @@
           </a:p>
         </p:txBody>
       </p:sp>
+      <p:pic>
+        <p:nvPicPr>
+          <p:cNvPr id="6" name="Picture 5" descr="dw-mapping.jpg"/>
+          <p:cNvPicPr>
+            <a:picLocks noChangeAspect="1"/>
+          </p:cNvPicPr>
+          <p:nvPr/>
+        </p:nvPicPr>
+        <p:blipFill>
+          <a:blip r:embed="rId2"/>
+          <a:stretch>
+            <a:fillRect/>
+          </a:stretch>
+        </p:blipFill>
+        <p:spPr>
+          <a:xfrm>
+            <a:off x="8732520" y="2057400"/>
+            <a:ext cx="2880360" cy="2880360"/>
+          </a:xfrm>
+          <a:prstGeom prst="rect">
+            <a:avLst/>
+          </a:prstGeom>
+        </p:spPr>
+      </p:pic>
     </p:spTree>
   </p:cSld>
   <p:clrMapOvr>
@@ -4033,8 +4081,8 @@
         </p:nvSpPr>
         <p:spPr>
           <a:xfrm>
-            <a:off x="640080" y="685800"/>
-            <a:ext cx="10972800" cy="1463040"/>
+            <a:off x="640080" y="658368"/>
+            <a:ext cx="7863840" cy="1645920"/>
           </a:xfrm>
           <a:prstGeom prst="rect">
             <a:avLst/>
@@ -4048,7 +4096,7 @@
           <a:lstStyle/>
           <a:p>
             <a:r>
-              <a:rPr sz="3200" b="1">
+              <a:rPr sz="3000" b="1">
                 <a:solidFill>
                   <a:srgbClr val="FFFFFF"/>
                 </a:solidFill>
@@ -4067,8 +4115,8 @@
         </p:nvSpPr>
         <p:spPr>
           <a:xfrm>
-            <a:off x="777240" y="2286000"/>
-            <a:ext cx="10607040" cy="4754880"/>
+            <a:off x="777240" y="2331720"/>
+            <a:ext cx="7498079" cy="4754880"/>
           </a:xfrm>
           <a:prstGeom prst="rect">
             <a:avLst/>
@@ -4087,7 +4135,7 @@
               </a:spcAft>
             </a:pPr>
             <a:r>
-              <a:rPr sz="2400" b="0">
+              <a:rPr sz="2200" b="0">
                 <a:solidFill>
                   <a:srgbClr val="FFFFFF"/>
                 </a:solidFill>
@@ -4103,7 +4151,7 @@
               </a:spcAft>
             </a:pPr>
             <a:r>
-              <a:rPr sz="2400" b="0">
+              <a:rPr sz="2200" b="0">
                 <a:solidFill>
                   <a:srgbClr val="FFFFFF"/>
                 </a:solidFill>
@@ -4114,6 +4162,30 @@
           </a:p>
         </p:txBody>
       </p:sp>
+      <p:pic>
+        <p:nvPicPr>
+          <p:cNvPr id="6" name="Picture 5" descr="dw-mapping.jpg"/>
+          <p:cNvPicPr>
+            <a:picLocks noChangeAspect="1"/>
+          </p:cNvPicPr>
+          <p:nvPr/>
+        </p:nvPicPr>
+        <p:blipFill>
+          <a:blip r:embed="rId2"/>
+          <a:stretch>
+            <a:fillRect/>
+          </a:stretch>
+        </p:blipFill>
+        <p:spPr>
+          <a:xfrm>
+            <a:off x="8732520" y="2057400"/>
+            <a:ext cx="2880360" cy="2880360"/>
+          </a:xfrm>
+          <a:prstGeom prst="rect">
+            <a:avLst/>
+          </a:prstGeom>
+        </p:spPr>
+      </p:pic>
     </p:spTree>
   </p:cSld>
   <p:clrMapOvr>
@@ -4217,8 +4289,8 @@
         </p:nvSpPr>
         <p:spPr>
           <a:xfrm>
-            <a:off x="640080" y="685800"/>
-            <a:ext cx="10972800" cy="1463040"/>
+            <a:off x="640080" y="658368"/>
+            <a:ext cx="7863840" cy="1645920"/>
           </a:xfrm>
           <a:prstGeom prst="rect">
             <a:avLst/>
@@ -4232,7 +4304,7 @@
           <a:lstStyle/>
           <a:p>
             <a:r>
-              <a:rPr sz="3200" b="1">
+              <a:rPr sz="3000" b="1">
                 <a:solidFill>
                   <a:srgbClr val="FFFFFF"/>
                 </a:solidFill>
@@ -4251,8 +4323,8 @@
         </p:nvSpPr>
         <p:spPr>
           <a:xfrm>
-            <a:off x="777240" y="2286000"/>
-            <a:ext cx="10607040" cy="4754880"/>
+            <a:off x="777240" y="2331720"/>
+            <a:ext cx="7498079" cy="4754880"/>
           </a:xfrm>
           <a:prstGeom prst="rect">
             <a:avLst/>
@@ -4271,7 +4343,7 @@
               </a:spcAft>
             </a:pPr>
             <a:r>
-              <a:rPr sz="2400" b="0">
+              <a:rPr sz="2200" b="0">
                 <a:solidFill>
                   <a:srgbClr val="FFFFFF"/>
                 </a:solidFill>
@@ -4287,7 +4359,7 @@
               </a:spcAft>
             </a:pPr>
             <a:r>
-              <a:rPr sz="2400" b="0">
+              <a:rPr sz="2200" b="0">
                 <a:solidFill>
                   <a:srgbClr val="FFFFFF"/>
                 </a:solidFill>
@@ -4303,7 +4375,7 @@
               </a:spcAft>
             </a:pPr>
             <a:r>
-              <a:rPr sz="2400" b="0">
+              <a:rPr sz="2200" b="0">
                 <a:solidFill>
                   <a:srgbClr val="FFFFFF"/>
                 </a:solidFill>
@@ -4319,7 +4391,7 @@
               </a:spcAft>
             </a:pPr>
             <a:r>
-              <a:rPr sz="2400" b="0">
+              <a:rPr sz="2200" b="0">
                 <a:solidFill>
                   <a:srgbClr val="FFFFFF"/>
                 </a:solidFill>
@@ -4330,6 +4402,30 @@
           </a:p>
         </p:txBody>
       </p:sp>
+      <p:pic>
+        <p:nvPicPr>
+          <p:cNvPr id="6" name="Picture 5" descr="dw-mapping.jpg"/>
+          <p:cNvPicPr>
+            <a:picLocks noChangeAspect="1"/>
+          </p:cNvPicPr>
+          <p:nvPr/>
+        </p:nvPicPr>
+        <p:blipFill>
+          <a:blip r:embed="rId2"/>
+          <a:stretch>
+            <a:fillRect/>
+          </a:stretch>
+        </p:blipFill>
+        <p:spPr>
+          <a:xfrm>
+            <a:off x="8732520" y="2057400"/>
+            <a:ext cx="2880360" cy="2880360"/>
+          </a:xfrm>
+          <a:prstGeom prst="rect">
+            <a:avLst/>
+          </a:prstGeom>
+        </p:spPr>
+      </p:pic>
     </p:spTree>
   </p:cSld>
   <p:clrMapOvr>
@@ -4433,8 +4529,8 @@
         </p:nvSpPr>
         <p:spPr>
           <a:xfrm>
-            <a:off x="640080" y="685800"/>
-            <a:ext cx="10972800" cy="1463040"/>
+            <a:off x="640080" y="658368"/>
+            <a:ext cx="7863840" cy="1645920"/>
           </a:xfrm>
           <a:prstGeom prst="rect">
             <a:avLst/>
@@ -4448,7 +4544,7 @@
           <a:lstStyle/>
           <a:p>
             <a:r>
-              <a:rPr sz="3200" b="1">
+              <a:rPr sz="3000" b="1">
                 <a:solidFill>
                   <a:srgbClr val="FFFFFF"/>
                 </a:solidFill>
@@ -4467,8 +4563,8 @@
         </p:nvSpPr>
         <p:spPr>
           <a:xfrm>
-            <a:off x="777240" y="2286000"/>
-            <a:ext cx="10607040" cy="4754880"/>
+            <a:off x="777240" y="2331720"/>
+            <a:ext cx="7498079" cy="4754880"/>
           </a:xfrm>
           <a:prstGeom prst="rect">
             <a:avLst/>
@@ -4487,7 +4583,7 @@
               </a:spcAft>
             </a:pPr>
             <a:r>
-              <a:rPr sz="2400" b="0">
+              <a:rPr sz="2200" b="0">
                 <a:solidFill>
                   <a:srgbClr val="FFFFFF"/>
                 </a:solidFill>
@@ -4503,7 +4599,7 @@
               </a:spcAft>
             </a:pPr>
             <a:r>
-              <a:rPr sz="2400" b="0">
+              <a:rPr sz="2200" b="0">
                 <a:solidFill>
                   <a:srgbClr val="FFFFFF"/>
                 </a:solidFill>
@@ -4519,7 +4615,7 @@
               </a:spcAft>
             </a:pPr>
             <a:r>
-              <a:rPr sz="2400" b="0">
+              <a:rPr sz="2200" b="0">
                 <a:solidFill>
                   <a:srgbClr val="FFFFFF"/>
                 </a:solidFill>
@@ -4535,7 +4631,7 @@
               </a:spcAft>
             </a:pPr>
             <a:r>
-              <a:rPr sz="2400" b="0">
+              <a:rPr sz="2200" b="0">
                 <a:solidFill>
                   <a:srgbClr val="FFFFFF"/>
                 </a:solidFill>
@@ -4546,6 +4642,30 @@
           </a:p>
         </p:txBody>
       </p:sp>
+      <p:pic>
+        <p:nvPicPr>
+          <p:cNvPr id="6" name="Picture 5" descr="dw-mapping.jpg"/>
+          <p:cNvPicPr>
+            <a:picLocks noChangeAspect="1"/>
+          </p:cNvPicPr>
+          <p:nvPr/>
+        </p:nvPicPr>
+        <p:blipFill>
+          <a:blip r:embed="rId2"/>
+          <a:stretch>
+            <a:fillRect/>
+          </a:stretch>
+        </p:blipFill>
+        <p:spPr>
+          <a:xfrm>
+            <a:off x="8732520" y="2057400"/>
+            <a:ext cx="2880360" cy="2880360"/>
+          </a:xfrm>
+          <a:prstGeom prst="rect">
+            <a:avLst/>
+          </a:prstGeom>
+        </p:spPr>
+      </p:pic>
     </p:spTree>
   </p:cSld>
   <p:clrMapOvr>
@@ -4649,8 +4769,8 @@
         </p:nvSpPr>
         <p:spPr>
           <a:xfrm>
-            <a:off x="640080" y="685800"/>
-            <a:ext cx="10972800" cy="1463040"/>
+            <a:off x="640080" y="658368"/>
+            <a:ext cx="7863840" cy="1645920"/>
           </a:xfrm>
           <a:prstGeom prst="rect">
             <a:avLst/>
@@ -4664,7 +4784,7 @@
           <a:lstStyle/>
           <a:p>
             <a:r>
-              <a:rPr sz="3200" b="1">
+              <a:rPr sz="3000" b="1">
                 <a:solidFill>
                   <a:srgbClr val="FFFFFF"/>
                 </a:solidFill>
@@ -4683,8 +4803,8 @@
         </p:nvSpPr>
         <p:spPr>
           <a:xfrm>
-            <a:off x="777240" y="2286000"/>
-            <a:ext cx="10607040" cy="4754880"/>
+            <a:off x="777240" y="2331720"/>
+            <a:ext cx="7498079" cy="4754880"/>
           </a:xfrm>
           <a:prstGeom prst="rect">
             <a:avLst/>
@@ -4703,7 +4823,7 @@
               </a:spcAft>
             </a:pPr>
             <a:r>
-              <a:rPr sz="2400" b="0">
+              <a:rPr sz="2200" b="0">
                 <a:solidFill>
                   <a:srgbClr val="FFFFFF"/>
                 </a:solidFill>
@@ -4719,7 +4839,7 @@
               </a:spcAft>
             </a:pPr>
             <a:r>
-              <a:rPr sz="2400" b="0">
+              <a:rPr sz="2200" b="0">
                 <a:solidFill>
                   <a:srgbClr val="FFFFFF"/>
                 </a:solidFill>
@@ -4735,7 +4855,7 @@
               </a:spcAft>
             </a:pPr>
             <a:r>
-              <a:rPr sz="2400" b="0">
+              <a:rPr sz="2200" b="0">
                 <a:solidFill>
                   <a:srgbClr val="FFFFFF"/>
                 </a:solidFill>
@@ -4751,7 +4871,7 @@
               </a:spcAft>
             </a:pPr>
             <a:r>
-              <a:rPr sz="2400" b="0">
+              <a:rPr sz="2200" b="0">
                 <a:solidFill>
                   <a:srgbClr val="FFFFFF"/>
                 </a:solidFill>
@@ -4762,6 +4882,30 @@
           </a:p>
         </p:txBody>
       </p:sp>
+      <p:pic>
+        <p:nvPicPr>
+          <p:cNvPr id="6" name="Picture 5" descr="dw-mapping.jpg"/>
+          <p:cNvPicPr>
+            <a:picLocks noChangeAspect="1"/>
+          </p:cNvPicPr>
+          <p:nvPr/>
+        </p:nvPicPr>
+        <p:blipFill>
+          <a:blip r:embed="rId2"/>
+          <a:stretch>
+            <a:fillRect/>
+          </a:stretch>
+        </p:blipFill>
+        <p:spPr>
+          <a:xfrm>
+            <a:off x="8732520" y="2057400"/>
+            <a:ext cx="2880360" cy="2880360"/>
+          </a:xfrm>
+          <a:prstGeom prst="rect">
+            <a:avLst/>
+          </a:prstGeom>
+        </p:spPr>
+      </p:pic>
     </p:spTree>
   </p:cSld>
   <p:clrMapOvr>
@@ -4865,8 +5009,8 @@
         </p:nvSpPr>
         <p:spPr>
           <a:xfrm>
-            <a:off x="640080" y="685800"/>
-            <a:ext cx="10972800" cy="1463040"/>
+            <a:off x="640080" y="658368"/>
+            <a:ext cx="7863840" cy="1645920"/>
           </a:xfrm>
           <a:prstGeom prst="rect">
             <a:avLst/>
@@ -4880,7 +5024,7 @@
           <a:lstStyle/>
           <a:p>
             <a:r>
-              <a:rPr sz="3200" b="1">
+              <a:rPr sz="3000" b="1">
                 <a:solidFill>
                   <a:srgbClr val="FFFFFF"/>
                 </a:solidFill>
@@ -4899,8 +5043,8 @@
         </p:nvSpPr>
         <p:spPr>
           <a:xfrm>
-            <a:off x="777240" y="2286000"/>
-            <a:ext cx="10607040" cy="4754880"/>
+            <a:off x="777240" y="2331720"/>
+            <a:ext cx="7498079" cy="4754880"/>
           </a:xfrm>
           <a:prstGeom prst="rect">
             <a:avLst/>
@@ -4919,7 +5063,7 @@
               </a:spcAft>
             </a:pPr>
             <a:r>
-              <a:rPr sz="2400" b="0">
+              <a:rPr sz="2200" b="0">
                 <a:solidFill>
                   <a:srgbClr val="FFFFFF"/>
                 </a:solidFill>
@@ -4935,7 +5079,7 @@
               </a:spcAft>
             </a:pPr>
             <a:r>
-              <a:rPr sz="2400" b="0">
+              <a:rPr sz="2200" b="0">
                 <a:solidFill>
                   <a:srgbClr val="FFFFFF"/>
                 </a:solidFill>
@@ -4951,7 +5095,7 @@
               </a:spcAft>
             </a:pPr>
             <a:r>
-              <a:rPr sz="2400" b="0">
+              <a:rPr sz="2200" b="0">
                 <a:solidFill>
                   <a:srgbClr val="FFFFFF"/>
                 </a:solidFill>
@@ -4967,7 +5111,7 @@
               </a:spcAft>
             </a:pPr>
             <a:r>
-              <a:rPr sz="2400" b="0">
+              <a:rPr sz="2200" b="0">
                 <a:solidFill>
                   <a:srgbClr val="FFFFFF"/>
                 </a:solidFill>
@@ -4978,6 +5122,30 @@
           </a:p>
         </p:txBody>
       </p:sp>
+      <p:pic>
+        <p:nvPicPr>
+          <p:cNvPr id="6" name="Picture 5" descr="dw-mapping.jpg"/>
+          <p:cNvPicPr>
+            <a:picLocks noChangeAspect="1"/>
+          </p:cNvPicPr>
+          <p:nvPr/>
+        </p:nvPicPr>
+        <p:blipFill>
+          <a:blip r:embed="rId2"/>
+          <a:stretch>
+            <a:fillRect/>
+          </a:stretch>
+        </p:blipFill>
+        <p:spPr>
+          <a:xfrm>
+            <a:off x="8732520" y="2057400"/>
+            <a:ext cx="2880360" cy="2880360"/>
+          </a:xfrm>
+          <a:prstGeom prst="rect">
+            <a:avLst/>
+          </a:prstGeom>
+        </p:spPr>
+      </p:pic>
     </p:spTree>
   </p:cSld>
   <p:clrMapOvr>
@@ -5081,8 +5249,8 @@
         </p:nvSpPr>
         <p:spPr>
           <a:xfrm>
-            <a:off x="640080" y="685800"/>
-            <a:ext cx="10972800" cy="1463040"/>
+            <a:off x="640080" y="658368"/>
+            <a:ext cx="7863840" cy="1645920"/>
           </a:xfrm>
           <a:prstGeom prst="rect">
             <a:avLst/>
@@ -5096,7 +5264,7 @@
           <a:lstStyle/>
           <a:p>
             <a:r>
-              <a:rPr sz="3200" b="1">
+              <a:rPr sz="3000" b="1">
                 <a:solidFill>
                   <a:srgbClr val="FFFFFF"/>
                 </a:solidFill>
@@ -5115,8 +5283,8 @@
         </p:nvSpPr>
         <p:spPr>
           <a:xfrm>
-            <a:off x="777240" y="2286000"/>
-            <a:ext cx="10607040" cy="4754880"/>
+            <a:off x="777240" y="2331720"/>
+            <a:ext cx="7498079" cy="4754880"/>
           </a:xfrm>
           <a:prstGeom prst="rect">
             <a:avLst/>
@@ -5135,7 +5303,7 @@
               </a:spcAft>
             </a:pPr>
             <a:r>
-              <a:rPr sz="2400" b="0">
+              <a:rPr sz="2200" b="0">
                 <a:solidFill>
                   <a:srgbClr val="FFFFFF"/>
                 </a:solidFill>
@@ -5151,7 +5319,7 @@
               </a:spcAft>
             </a:pPr>
             <a:r>
-              <a:rPr sz="2400" b="0">
+              <a:rPr sz="2200" b="0">
                 <a:solidFill>
                   <a:srgbClr val="FFFFFF"/>
                 </a:solidFill>
@@ -5167,7 +5335,7 @@
               </a:spcAft>
             </a:pPr>
             <a:r>
-              <a:rPr sz="2400" b="0">
+              <a:rPr sz="2200" b="0">
                 <a:solidFill>
                   <a:srgbClr val="FFFFFF"/>
                 </a:solidFill>
@@ -5183,7 +5351,7 @@
               </a:spcAft>
             </a:pPr>
             <a:r>
-              <a:rPr sz="2400" b="0">
+              <a:rPr sz="2200" b="0">
                 <a:solidFill>
                   <a:srgbClr val="FFFFFF"/>
                 </a:solidFill>
@@ -5194,6 +5362,30 @@
           </a:p>
         </p:txBody>
       </p:sp>
+      <p:pic>
+        <p:nvPicPr>
+          <p:cNvPr id="6" name="Picture 5" descr="dw-loop.jpg"/>
+          <p:cNvPicPr>
+            <a:picLocks noChangeAspect="1"/>
+          </p:cNvPicPr>
+          <p:nvPr/>
+        </p:nvPicPr>
+        <p:blipFill>
+          <a:blip r:embed="rId2"/>
+          <a:stretch>
+            <a:fillRect/>
+          </a:stretch>
+        </p:blipFill>
+        <p:spPr>
+          <a:xfrm>
+            <a:off x="8549640" y="1965960"/>
+            <a:ext cx="3108960" cy="3108960"/>
+          </a:xfrm>
+          <a:prstGeom prst="rect">
+            <a:avLst/>
+          </a:prstGeom>
+        </p:spPr>
+      </p:pic>
     </p:spTree>
   </p:cSld>
   <p:clrMapOvr>
